--- a/Seminario de Sistemas/Clases/Clase 4 - Metodologias agiles/Presentacion.pptx
+++ b/Seminario de Sistemas/Clases/Clase 4 - Metodologias agiles/Presentacion.pptx
@@ -5469,7 +5469,7 @@
                 </a:solidFill>
                 <a:latin typeface="Calibri"/>
               </a:rPr>
-              <a:t>Entrega en ExamLab (examlab.lovable.app/app)</a:t>
+              <a:t>Entrega en ExamLab (https://examlab.lovable.app/)</a:t>
             </a:r>
             <a:r>
               <a:rPr sz="1600" b="0" i="0">
@@ -6073,7 +6073,7 @@
                 </a:solidFill>
                 <a:latin typeface="Calibri"/>
               </a:rPr>
-              <a:t>Entrega del taller en ExamLab (examlab.lovable.app/app) · domingo 23:59.</a:t>
+              <a:t>Entrega del taller en ExamLab (https://examlab.lovable.app/) · domingo 23:59.</a:t>
             </a:r>
           </a:p>
         </p:txBody>

--- a/Seminario de Sistemas/Clases/Clase 4 - Metodologias agiles/Presentacion.pptx
+++ b/Seminario de Sistemas/Clases/Clase 4 - Metodologias agiles/Presentacion.pptx
@@ -7773,22 +7773,6 @@
                 <a:latin typeface="Calibri"/>
               </a:rPr>
               <a:t>–   Agil no significa trabajar sin documentacion, y este es el malentendido que mas daño hace</a:t>
-            </a:r>
-          </a:p>
-          <a:p>
-            <a:pPr>
-              <a:spcAft>
-                <a:spcPts val="800"/>
-              </a:spcAft>
-            </a:pPr>
-            <a:r>
-              <a:rPr sz="1500" b="0" i="0">
-                <a:solidFill>
-                  <a:srgbClr val="333333"/>
-                </a:solidFill>
-                <a:latin typeface="Calibri"/>
-              </a:rPr>
-              <a:t>–   Error tipico del docente que no domina el tema: enseñar que agil es 'sin plan, sin documentos y sin fechas'…</a:t>
             </a:r>
           </a:p>
         </p:txBody>

--- a/Seminario de Sistemas/Clases/Clase 4 - Metodologias agiles/Presentacion.pptx
+++ b/Seminario de Sistemas/Clases/Clase 4 - Metodologias agiles/Presentacion.pptx
@@ -4239,7 +4239,7 @@
                 </a:solidFill>
                 <a:latin typeface="Calibri"/>
               </a:rPr>
-              <a:t>Redacte la Definicion de Terminado del equipo para artefactos de diseño (por ejemplo: tiene diagrama en draw.io, tiene mockup, esta revisado por un compañero y tiene el visto bueno del cliente) y escribala en la cabecera del tablero.</a:t>
+              <a:t>Redacte la Definicion de Terminado para artefactos de diseño (por ejemplo: tiene diagrama en draw.io, tiene mockup, esta revisado por un compañero y tiene el visto bueno del cliente) y escribala en la cabecera del tablero.</a:t>
             </a:r>
           </a:p>
         </p:txBody>
@@ -5308,7 +5308,7 @@
                 </a:solidFill>
                 <a:latin typeface="Calibri"/>
               </a:rPr>
-              <a:t> Un tablero en draw.io o Excalidraw con el Product Backlog priorizado de VetCare y las columnas de flujo con limite de trabajo en curso, mas un documento con el plan de tres sprints (objetivo y entregable de diseño de cada uno), la Definicion de Terminado del equipo y tres historias de usuario con criterios en formato Dado/Cuando/Entonces.</a:t>
+              <a:t> Un tablero en draw.io o Excalidraw con el Product Backlog priorizado de VetCare y las columnas de flujo con limite de trabajo en curso, mas un documento con el plan de tres sprints (objetivo y entregable de diseño de cada uno), la Definicion de Terminado y tres historias de usuario con criterios en formato Dado/Cuando/Entonces.</a:t>
             </a:r>
           </a:p>
           <a:p>
@@ -6289,7 +6289,7 @@
                 </a:solidFill>
                 <a:latin typeface="Calibri"/>
               </a:rPr>
-              <a:t>Entregable: Un tablero en draw.io o Excalidraw con el Product Backlog priorizado de VetCare y las columnas de flujo con limite de trabajo en curso, mas un documento con el plan de tres sprints (objetivo y entregable de diseño de cada uno), la Definicion de Terminado del equipo y tres historias de usuario con criterios en formato Dado/Cuando/Entonces.</a:t>
+              <a:t>Entregable: Un tablero en draw.io o Excalidraw con el Product Backlog priorizado de VetCare y las columnas de flujo con limite de trabajo en curso, mas un documento con el plan de tres sprints (objetivo y entregable de diseño de cada uno), la Definicion de Terminado y tres historias de usuario con criterios en formato Dado/Cuando/Entonces.</a:t>
             </a:r>
           </a:p>
           <a:p>
@@ -6620,7 +6620,7 @@
                 </a:solidFill>
                 <a:latin typeface="Calibri"/>
               </a:rPr>
-              <a:t> Un tablero en draw.io o Excalidraw con el Product Backlog priorizado de VetCare y las columnas de flujo con limite de trabajo en curso, mas un documento con el plan de tres sprints (objetivo y entregable de diseño de cada uno), la Definicion de Terminado del equipo y tres historias de usuario con criterios en formato Dado/Cuando/Entonces.</a:t>
+              <a:t> Un tablero en draw.io o Excalidraw con el Product Backlog priorizado de VetCare y las columnas de flujo con limite de trabajo en curso, mas un documento con el plan de tres sprints (objetivo y entregable de diseño de cada uno), la Definicion de Terminado y tres historias de usuario con criterios en formato Dado/Cuando/Entonces.</a:t>
             </a:r>
           </a:p>
           <a:p>

--- a/Seminario de Sistemas/Clases/Clase 4 - Metodologias agiles/Presentacion.pptx
+++ b/Seminario de Sistemas/Clases/Clase 4 - Metodologias agiles/Presentacion.pptx
@@ -5469,7 +5469,7 @@
                 </a:solidFill>
                 <a:latin typeface="Calibri"/>
               </a:rPr>
-              <a:t>Entrega en ExamLab (https://examlab.lovable.app/)</a:t>
+              <a:t>Entrega en ExamLab (https://uniaj.examlab.workers.dev/)</a:t>
             </a:r>
             <a:r>
               <a:rPr sz="1600" b="0" i="0">
@@ -6073,7 +6073,7 @@
                 </a:solidFill>
                 <a:latin typeface="Calibri"/>
               </a:rPr>
-              <a:t>Entrega del taller en ExamLab (https://examlab.lovable.app/) · domingo 23:59.</a:t>
+              <a:t>Entrega del taller en ExamLab (https://uniaj.examlab.workers.dev/) · domingo 23:59.</a:t>
             </a:r>
           </a:p>
         </p:txBody>

--- a/Seminario de Sistemas/Clases/Clase 4 - Metodologias agiles/Presentacion.pptx
+++ b/Seminario de Sistemas/Clases/Clase 4 - Metodologias agiles/Presentacion.pptx
@@ -3633,7 +3633,7 @@
         <p:spPr>
           <a:xfrm>
             <a:off x="457200" y="1234440"/>
-            <a:ext cx="11277295" cy="777240"/>
+            <a:ext cx="11277295" cy="950976"/>
           </a:xfrm>
           <a:prstGeom prst="roundRect">
             <a:avLst>
@@ -3677,7 +3677,7 @@
         </p:nvSpPr>
         <p:spPr>
           <a:xfrm>
-            <a:off x="594360" y="1403604"/>
+            <a:off x="594360" y="1490472"/>
             <a:ext cx="438912" cy="438912"/>
           </a:xfrm>
           <a:prstGeom prst="roundRect">
@@ -3722,7 +3722,7 @@
         </p:nvSpPr>
         <p:spPr>
           <a:xfrm>
-            <a:off x="594360" y="1403604"/>
+            <a:off x="594360" y="1490472"/>
             <a:ext cx="438912" cy="438912"/>
           </a:xfrm>
           <a:prstGeom prst="rect">
@@ -3756,7 +3756,7 @@
         <p:spPr>
           <a:xfrm>
             <a:off x="1188720" y="1325880"/>
-            <a:ext cx="10271455" cy="612647"/>
+            <a:ext cx="10271455" cy="786384"/>
           </a:xfrm>
           <a:prstGeom prst="rect">
             <a:avLst/>
@@ -3787,8 +3787,8 @@
         </p:nvSpPr>
         <p:spPr>
           <a:xfrm>
-            <a:off x="457200" y="2103120"/>
-            <a:ext cx="11277295" cy="777240"/>
+            <a:off x="457200" y="2276856"/>
+            <a:ext cx="11277295" cy="950976"/>
           </a:xfrm>
           <a:prstGeom prst="roundRect">
             <a:avLst>
@@ -3832,7 +3832,7 @@
         </p:nvSpPr>
         <p:spPr>
           <a:xfrm>
-            <a:off x="594360" y="2272284"/>
+            <a:off x="594360" y="2532888"/>
             <a:ext cx="438912" cy="438912"/>
           </a:xfrm>
           <a:prstGeom prst="roundRect">
@@ -3877,7 +3877,7 @@
         </p:nvSpPr>
         <p:spPr>
           <a:xfrm>
-            <a:off x="594360" y="2272284"/>
+            <a:off x="594360" y="2532888"/>
             <a:ext cx="438912" cy="438912"/>
           </a:xfrm>
           <a:prstGeom prst="rect">
@@ -3910,8 +3910,8 @@
         </p:nvSpPr>
         <p:spPr>
           <a:xfrm>
-            <a:off x="1188720" y="2194560"/>
-            <a:ext cx="10271455" cy="612647"/>
+            <a:off x="1188720" y="2368296"/>
+            <a:ext cx="10271455" cy="786384"/>
           </a:xfrm>
           <a:prstGeom prst="rect">
             <a:avLst/>
@@ -3942,8 +3942,8 @@
         </p:nvSpPr>
         <p:spPr>
           <a:xfrm>
-            <a:off x="457200" y="2971800"/>
-            <a:ext cx="11277295" cy="777240"/>
+            <a:off x="457200" y="3319272"/>
+            <a:ext cx="11277295" cy="950976"/>
           </a:xfrm>
           <a:prstGeom prst="roundRect">
             <a:avLst>
@@ -3987,7 +3987,7 @@
         </p:nvSpPr>
         <p:spPr>
           <a:xfrm>
-            <a:off x="594360" y="3140964"/>
+            <a:off x="594360" y="3575304"/>
             <a:ext cx="438912" cy="438912"/>
           </a:xfrm>
           <a:prstGeom prst="roundRect">
@@ -4032,7 +4032,7 @@
         </p:nvSpPr>
         <p:spPr>
           <a:xfrm>
-            <a:off x="594360" y="3140964"/>
+            <a:off x="594360" y="3575304"/>
             <a:ext cx="438912" cy="438912"/>
           </a:xfrm>
           <a:prstGeom prst="rect">
@@ -4065,8 +4065,8 @@
         </p:nvSpPr>
         <p:spPr>
           <a:xfrm>
-            <a:off x="1188720" y="3063240"/>
-            <a:ext cx="10271455" cy="612647"/>
+            <a:off x="1188720" y="3410712"/>
+            <a:ext cx="10271455" cy="786384"/>
           </a:xfrm>
           <a:prstGeom prst="rect">
             <a:avLst/>
@@ -4097,8 +4097,8 @@
         </p:nvSpPr>
         <p:spPr>
           <a:xfrm>
-            <a:off x="457200" y="3840479"/>
-            <a:ext cx="11277295" cy="777240"/>
+            <a:off x="457200" y="4361688"/>
+            <a:ext cx="11277295" cy="950976"/>
           </a:xfrm>
           <a:prstGeom prst="roundRect">
             <a:avLst>
@@ -4142,7 +4142,7 @@
         </p:nvSpPr>
         <p:spPr>
           <a:xfrm>
-            <a:off x="594360" y="4009643"/>
+            <a:off x="594360" y="4617720"/>
             <a:ext cx="438912" cy="438912"/>
           </a:xfrm>
           <a:prstGeom prst="roundRect">
@@ -4187,7 +4187,7 @@
         </p:nvSpPr>
         <p:spPr>
           <a:xfrm>
-            <a:off x="594360" y="4009643"/>
+            <a:off x="594360" y="4617720"/>
             <a:ext cx="438912" cy="438912"/>
           </a:xfrm>
           <a:prstGeom prst="rect">
@@ -4220,8 +4220,8 @@
         </p:nvSpPr>
         <p:spPr>
           <a:xfrm>
-            <a:off x="1188720" y="3931919"/>
-            <a:ext cx="10271455" cy="612647"/>
+            <a:off x="1188720" y="4453128"/>
+            <a:ext cx="10271455" cy="786384"/>
           </a:xfrm>
           <a:prstGeom prst="rect">
             <a:avLst/>
@@ -4252,8 +4252,8 @@
         </p:nvSpPr>
         <p:spPr>
           <a:xfrm>
-            <a:off x="457200" y="4709160"/>
-            <a:ext cx="11277295" cy="777240"/>
+            <a:off x="457200" y="5404104"/>
+            <a:ext cx="11277295" cy="950976"/>
           </a:xfrm>
           <a:prstGeom prst="roundRect">
             <a:avLst>
@@ -4297,7 +4297,7 @@
         </p:nvSpPr>
         <p:spPr>
           <a:xfrm>
-            <a:off x="594360" y="4878324"/>
+            <a:off x="594360" y="5660136"/>
             <a:ext cx="438912" cy="438912"/>
           </a:xfrm>
           <a:prstGeom prst="roundRect">
@@ -4342,7 +4342,7 @@
         </p:nvSpPr>
         <p:spPr>
           <a:xfrm>
-            <a:off x="594360" y="4878324"/>
+            <a:off x="594360" y="5660136"/>
             <a:ext cx="438912" cy="438912"/>
           </a:xfrm>
           <a:prstGeom prst="rect">
@@ -4375,8 +4375,8 @@
         </p:nvSpPr>
         <p:spPr>
           <a:xfrm>
-            <a:off x="1188720" y="4800600"/>
-            <a:ext cx="10271455" cy="612647"/>
+            <a:off x="1188720" y="5495544"/>
+            <a:ext cx="10271455" cy="786384"/>
           </a:xfrm>
           <a:prstGeom prst="rect">
             <a:avLst/>
@@ -9010,8 +9010,8 @@
         </p:blipFill>
         <p:spPr>
           <a:xfrm>
-            <a:off x="1743913" y="1792224"/>
-            <a:ext cx="1051560" cy="1051560"/>
+            <a:off x="1659331" y="1847087"/>
+            <a:ext cx="1220724" cy="1220724"/>
           </a:xfrm>
           <a:prstGeom prst="rect">
             <a:avLst/>
@@ -9026,8 +9026,8 @@
         </p:nvSpPr>
         <p:spPr>
           <a:xfrm>
-            <a:off x="530352" y="2916936"/>
-            <a:ext cx="3478682" cy="502920"/>
+            <a:off x="530352" y="3159251"/>
+            <a:ext cx="3478682" cy="621792"/>
           </a:xfrm>
           <a:prstGeom prst="rect">
             <a:avLst/>
@@ -9214,8 +9214,8 @@
         </p:blipFill>
         <p:spPr>
           <a:xfrm>
-            <a:off x="5570067" y="1792224"/>
-            <a:ext cx="1051560" cy="1051560"/>
+            <a:off x="5485485" y="1847087"/>
+            <a:ext cx="1220724" cy="1220724"/>
           </a:xfrm>
           <a:prstGeom prst="rect">
             <a:avLst/>
@@ -9230,8 +9230,8 @@
         </p:nvSpPr>
         <p:spPr>
           <a:xfrm>
-            <a:off x="4356506" y="2916936"/>
-            <a:ext cx="3478682" cy="502920"/>
+            <a:off x="4356506" y="3159251"/>
+            <a:ext cx="3478682" cy="621792"/>
           </a:xfrm>
           <a:prstGeom prst="rect">
             <a:avLst/>
@@ -9418,8 +9418,8 @@
         </p:blipFill>
         <p:spPr>
           <a:xfrm>
-            <a:off x="9396222" y="1792224"/>
-            <a:ext cx="1051560" cy="1051560"/>
+            <a:off x="9311640" y="1847087"/>
+            <a:ext cx="1220724" cy="1220724"/>
           </a:xfrm>
           <a:prstGeom prst="rect">
             <a:avLst/>
@@ -9434,8 +9434,8 @@
         </p:nvSpPr>
         <p:spPr>
           <a:xfrm>
-            <a:off x="8182660" y="2916936"/>
-            <a:ext cx="3478682" cy="502920"/>
+            <a:off x="8182660" y="3159251"/>
+            <a:ext cx="3478682" cy="621792"/>
           </a:xfrm>
           <a:prstGeom prst="rect">
             <a:avLst/>
@@ -9483,7 +9483,7 @@
         </p:nvSpPr>
         <p:spPr>
           <a:xfrm>
-            <a:off x="457200" y="4055364"/>
+            <a:off x="4283354" y="4055364"/>
             <a:ext cx="3624986" cy="2299716"/>
           </a:xfrm>
           <a:prstGeom prst="roundRect">
@@ -9528,7 +9528,7 @@
         </p:nvSpPr>
         <p:spPr>
           <a:xfrm>
-            <a:off x="457200" y="4055364"/>
+            <a:off x="4283354" y="4055364"/>
             <a:ext cx="3624986" cy="64008"/>
           </a:xfrm>
           <a:prstGeom prst="rect">
@@ -9571,7 +9571,7 @@
         </p:nvSpPr>
         <p:spPr>
           <a:xfrm>
-            <a:off x="457200" y="4119372"/>
+            <a:off x="4283354" y="4119372"/>
             <a:ext cx="3624986" cy="27432"/>
           </a:xfrm>
           <a:prstGeom prst="rect">
@@ -9622,8 +9622,8 @@
         </p:blipFill>
         <p:spPr>
           <a:xfrm>
-            <a:off x="1743913" y="4256532"/>
-            <a:ext cx="1051560" cy="1051560"/>
+            <a:off x="5485485" y="4311396"/>
+            <a:ext cx="1220724" cy="1220724"/>
           </a:xfrm>
           <a:prstGeom prst="rect">
             <a:avLst/>
@@ -9638,8 +9638,8 @@
         </p:nvSpPr>
         <p:spPr>
           <a:xfrm>
-            <a:off x="530352" y="5381244"/>
-            <a:ext cx="3478682" cy="502920"/>
+            <a:off x="4356506" y="5623560"/>
+            <a:ext cx="3478682" cy="621792"/>
           </a:xfrm>
           <a:prstGeom prst="rect">
             <a:avLst/>

--- a/Seminario de Sistemas/Clases/Clase 4 - Metodologias agiles/Presentacion.pptx
+++ b/Seminario de Sistemas/Clases/Clase 4 - Metodologias agiles/Presentacion.pptx
@@ -4388,7 +4388,7 @@
           <a:lstStyle/>
           <a:p>
             <a:r>
-              <a:rPr sz="1500" b="1" i="0">
+              <a:rPr sz="1400" b="1" i="0">
                 <a:solidFill>
                   <a:srgbClr val="095292"/>
                 </a:solidFill>
@@ -5284,7 +5284,7 @@
               </a:spcAft>
             </a:pPr>
             <a:r>
-              <a:rPr sz="1600" b="0" i="0">
+              <a:rPr sz="2000" b="0" i="0">
                 <a:solidFill>
                   <a:srgbClr val="333333"/>
                 </a:solidFill>
@@ -5293,7 +5293,7 @@
               <a:t>–   </a:t>
             </a:r>
             <a:r>
-              <a:rPr sz="1600" b="1" i="0">
+              <a:rPr sz="2000" b="1" i="0">
                 <a:solidFill>
                   <a:srgbClr val="333333"/>
                 </a:solidFill>
@@ -5302,7 +5302,7 @@
               <a:t>Entregable:</a:t>
             </a:r>
             <a:r>
-              <a:rPr sz="1600" b="0" i="0">
+              <a:rPr sz="2000" b="0" i="0">
                 <a:solidFill>
                   <a:srgbClr val="333333"/>
                 </a:solidFill>
@@ -5318,7 +5318,7 @@
               </a:spcAft>
             </a:pPr>
             <a:r>
-              <a:rPr sz="1600" b="0" i="0">
+              <a:rPr sz="2000" b="0" i="0">
                 <a:solidFill>
                   <a:srgbClr val="333333"/>
                 </a:solidFill>
@@ -5327,7 +5327,7 @@
               <a:t>–   </a:t>
             </a:r>
             <a:r>
-              <a:rPr sz="1600" b="1" i="0">
+              <a:rPr sz="2000" b="1" i="0">
                 <a:solidFill>
                   <a:srgbClr val="333333"/>
                 </a:solidFill>
@@ -5336,7 +5336,7 @@
               <a:t>Exito:</a:t>
             </a:r>
             <a:r>
-              <a:rPr sz="1600" b="0" i="0">
+              <a:rPr sz="2000" b="0" i="0">
                 <a:solidFill>
                   <a:srgbClr val="333333"/>
                 </a:solidFill>
@@ -5352,7 +5352,7 @@
               </a:spcAft>
             </a:pPr>
             <a:r>
-              <a:rPr sz="1600" b="0" i="0">
+              <a:rPr sz="2000" b="0" i="0">
                 <a:solidFill>
                   <a:srgbClr val="333333"/>
                 </a:solidFill>
@@ -5361,7 +5361,7 @@
               <a:t>–   </a:t>
             </a:r>
             <a:r>
-              <a:rPr sz="1600" b="1" i="0">
+              <a:rPr sz="2000" b="1" i="0">
                 <a:solidFill>
                   <a:srgbClr val="333333"/>
                 </a:solidFill>
@@ -5370,7 +5370,7 @@
               <a:t>Exito:</a:t>
             </a:r>
             <a:r>
-              <a:rPr sz="1600" b="0" i="0">
+              <a:rPr sz="2000" b="0" i="0">
                 <a:solidFill>
                   <a:srgbClr val="333333"/>
                 </a:solidFill>
@@ -5386,7 +5386,7 @@
               </a:spcAft>
             </a:pPr>
             <a:r>
-              <a:rPr sz="1600" b="0" i="0">
+              <a:rPr sz="2000" b="0" i="0">
                 <a:solidFill>
                   <a:srgbClr val="333333"/>
                 </a:solidFill>
@@ -5395,7 +5395,7 @@
               <a:t>–   </a:t>
             </a:r>
             <a:r>
-              <a:rPr sz="1600" b="1" i="0">
+              <a:rPr sz="2000" b="1" i="0">
                 <a:solidFill>
                   <a:srgbClr val="333333"/>
                 </a:solidFill>
@@ -5404,7 +5404,7 @@
               <a:t>Exito:</a:t>
             </a:r>
             <a:r>
-              <a:rPr sz="1600" b="0" i="0">
+              <a:rPr sz="2000" b="0" i="0">
                 <a:solidFill>
                   <a:srgbClr val="333333"/>
                 </a:solidFill>
@@ -5420,7 +5420,7 @@
               </a:spcAft>
             </a:pPr>
             <a:r>
-              <a:rPr sz="1600" b="0" i="0">
+              <a:rPr sz="2000" b="0" i="0">
                 <a:solidFill>
                   <a:srgbClr val="333333"/>
                 </a:solidFill>
@@ -5429,7 +5429,7 @@
               <a:t>–   </a:t>
             </a:r>
             <a:r>
-              <a:rPr sz="1600" b="1" i="0">
+              <a:rPr sz="2000" b="1" i="0">
                 <a:solidFill>
                   <a:srgbClr val="333333"/>
                 </a:solidFill>
@@ -5438,7 +5438,7 @@
               <a:t>Exito:</a:t>
             </a:r>
             <a:r>
-              <a:rPr sz="1600" b="0" i="0">
+              <a:rPr sz="2000" b="0" i="0">
                 <a:solidFill>
                   <a:srgbClr val="333333"/>
                 </a:solidFill>
@@ -5454,7 +5454,7 @@
               </a:spcAft>
             </a:pPr>
             <a:r>
-              <a:rPr sz="1600" b="0" i="0">
+              <a:rPr sz="2000" b="0" i="0">
                 <a:solidFill>
                   <a:srgbClr val="333333"/>
                 </a:solidFill>
@@ -5463,7 +5463,7 @@
               <a:t>–   </a:t>
             </a:r>
             <a:r>
-              <a:rPr sz="1600" b="1" i="0">
+              <a:rPr sz="2000" b="1" i="0">
                 <a:solidFill>
                   <a:srgbClr val="333333"/>
                 </a:solidFill>
@@ -5472,7 +5472,7 @@
               <a:t>Entrega en ExamLab (https://uniaj.examlab.workers.dev/)</a:t>
             </a:r>
             <a:r>
-              <a:rPr sz="1600" b="0" i="0">
+              <a:rPr sz="2000" b="0" i="0">
                 <a:solidFill>
                   <a:srgbClr val="333333"/>
                 </a:solidFill>
@@ -6519,7 +6519,7 @@
               </a:spcAft>
             </a:pPr>
             <a:r>
-              <a:rPr sz="1600" b="0" i="0">
+              <a:rPr sz="2000" b="0" i="0">
                 <a:solidFill>
                   <a:srgbClr val="333333"/>
                 </a:solidFill>
@@ -6528,7 +6528,7 @@
               <a:t>–   </a:t>
             </a:r>
             <a:r>
-              <a:rPr sz="1600" b="1" i="0">
+              <a:rPr sz="2000" b="1" i="0">
                 <a:solidFill>
                   <a:srgbClr val="333333"/>
                 </a:solidFill>
@@ -6537,7 +6537,7 @@
               <a:t>Hoy avanzamos VetCare en:</a:t>
             </a:r>
             <a:r>
-              <a:rPr sz="1600" b="0" i="0">
+              <a:rPr sz="2000" b="0" i="0">
                 <a:solidFill>
                   <a:srgbClr val="333333"/>
                 </a:solidFill>
@@ -6553,7 +6553,7 @@
               </a:spcAft>
             </a:pPr>
             <a:r>
-              <a:rPr sz="1600" b="0" i="0">
+              <a:rPr sz="2000" b="0" i="0">
                 <a:solidFill>
                   <a:srgbClr val="333333"/>
                 </a:solidFill>
@@ -6562,7 +6562,7 @@
               <a:t>–   Herramienta: </a:t>
             </a:r>
             <a:r>
-              <a:rPr sz="1600" b="1" i="0">
+              <a:rPr sz="2000" b="1" i="0">
                 <a:solidFill>
                   <a:srgbClr val="333333"/>
                 </a:solidFill>
@@ -6571,7 +6571,7 @@
               <a:t>draw.io · Excalidraw · Google Docs</a:t>
             </a:r>
             <a:r>
-              <a:rPr sz="1600" b="0" i="0">
+              <a:rPr sz="2000" b="0" i="0">
                 <a:solidFill>
                   <a:srgbClr val="333333"/>
                 </a:solidFill>
@@ -6580,7 +6580,7 @@
               <a:t> · Bloque </a:t>
             </a:r>
             <a:r>
-              <a:rPr sz="1600" b="1" i="0">
+              <a:rPr sz="2000" b="1" i="0">
                 <a:solidFill>
                   <a:srgbClr val="333333"/>
                 </a:solidFill>
@@ -6596,7 +6596,7 @@
               </a:spcAft>
             </a:pPr>
             <a:r>
-              <a:rPr sz="1600" b="0" i="0">
+              <a:rPr sz="2000" b="0" i="0">
                 <a:solidFill>
                   <a:srgbClr val="333333"/>
                 </a:solidFill>
@@ -6605,7 +6605,7 @@
               <a:t>–   </a:t>
             </a:r>
             <a:r>
-              <a:rPr sz="1600" b="1" i="0">
+              <a:rPr sz="2000" b="1" i="0">
                 <a:solidFill>
                   <a:srgbClr val="333333"/>
                 </a:solidFill>
@@ -6614,7 +6614,7 @@
               <a:t>Entregable de hoy:</a:t>
             </a:r>
             <a:r>
-              <a:rPr sz="1600" b="0" i="0">
+              <a:rPr sz="2000" b="0" i="0">
                 <a:solidFill>
                   <a:srgbClr val="333333"/>
                 </a:solidFill>
@@ -6630,7 +6630,7 @@
               </a:spcAft>
             </a:pPr>
             <a:r>
-              <a:rPr sz="1600" b="0" i="0">
+              <a:rPr sz="2000" b="0" i="0">
                 <a:solidFill>
                   <a:srgbClr val="333333"/>
                 </a:solidFill>
@@ -6954,7 +6954,7 @@
         <p:spPr>
           <a:xfrm>
             <a:off x="502920" y="2587752"/>
-            <a:ext cx="2164019" cy="2560320"/>
+            <a:ext cx="2164019" cy="3310128"/>
           </a:xfrm>
           <a:prstGeom prst="rect">
             <a:avLst/>
@@ -7069,7 +7069,7 @@
         <p:spPr>
           <a:xfrm>
             <a:off x="2758379" y="2587752"/>
-            <a:ext cx="2164019" cy="2560320"/>
+            <a:ext cx="2164019" cy="3310128"/>
           </a:xfrm>
           <a:prstGeom prst="rect">
             <a:avLst/>
@@ -7184,7 +7184,7 @@
         <p:spPr>
           <a:xfrm>
             <a:off x="5013838" y="2587752"/>
-            <a:ext cx="2164019" cy="2560320"/>
+            <a:ext cx="2164019" cy="3310128"/>
           </a:xfrm>
           <a:prstGeom prst="rect">
             <a:avLst/>
@@ -7299,7 +7299,7 @@
         <p:spPr>
           <a:xfrm>
             <a:off x="7269297" y="2587752"/>
-            <a:ext cx="2164019" cy="2560320"/>
+            <a:ext cx="2164019" cy="3310128"/>
           </a:xfrm>
           <a:prstGeom prst="rect">
             <a:avLst/>
@@ -7414,7 +7414,7 @@
         <p:spPr>
           <a:xfrm>
             <a:off x="9524756" y="2587752"/>
-            <a:ext cx="2164019" cy="2560320"/>
+            <a:ext cx="2164019" cy="3310128"/>
           </a:xfrm>
           <a:prstGeom prst="rect">
             <a:avLst/>
@@ -7448,8 +7448,8 @@
         </p:nvSpPr>
         <p:spPr>
           <a:xfrm>
-            <a:off x="457200" y="5943600"/>
-            <a:ext cx="11277295" cy="365760"/>
+            <a:off x="457200" y="5806440"/>
+            <a:ext cx="11277295" cy="640080"/>
           </a:xfrm>
           <a:prstGeom prst="rect">
             <a:avLst/>
@@ -7702,7 +7702,7 @@
               </a:spcAft>
             </a:pPr>
             <a:r>
-              <a:rPr sz="1500" b="0" i="0">
+              <a:rPr sz="2000" b="0" i="0">
                 <a:solidFill>
                   <a:srgbClr val="333333"/>
                 </a:solidFill>
@@ -7718,7 +7718,7 @@
               </a:spcAft>
             </a:pPr>
             <a:r>
-              <a:rPr sz="1500" b="0" i="0">
+              <a:rPr sz="2000" b="0" i="0">
                 <a:solidFill>
                   <a:srgbClr val="333333"/>
                 </a:solidFill>
@@ -7734,7 +7734,7 @@
               </a:spcAft>
             </a:pPr>
             <a:r>
-              <a:rPr sz="1500" b="0" i="0">
+              <a:rPr sz="2000" b="0" i="0">
                 <a:solidFill>
                   <a:srgbClr val="333333"/>
                 </a:solidFill>
@@ -7750,7 +7750,7 @@
               </a:spcAft>
             </a:pPr>
             <a:r>
-              <a:rPr sz="1500" b="0" i="0">
+              <a:rPr sz="2000" b="0" i="0">
                 <a:solidFill>
                   <a:srgbClr val="333333"/>
                 </a:solidFill>
@@ -7766,7 +7766,7 @@
               </a:spcAft>
             </a:pPr>
             <a:r>
-              <a:rPr sz="1500" b="0" i="0">
+              <a:rPr sz="2000" b="0" i="0">
                 <a:solidFill>
                   <a:srgbClr val="333333"/>
                 </a:solidFill>
@@ -8569,7 +8569,7 @@
               </a:spcAft>
             </a:pPr>
             <a:r>
-              <a:rPr sz="1600" b="0" i="0">
+              <a:rPr sz="2000" b="0" i="0">
                 <a:solidFill>
                   <a:srgbClr val="333333"/>
                 </a:solidFill>
@@ -8578,7 +8578,7 @@
               <a:t>–   </a:t>
             </a:r>
             <a:r>
-              <a:rPr sz="1600" b="1" i="0">
+              <a:rPr sz="2000" b="1" i="0">
                 <a:solidFill>
                   <a:srgbClr val="333333"/>
                 </a:solidFill>
@@ -8587,7 +8587,7 @@
               <a:t>Herramienta:</a:t>
             </a:r>
             <a:r>
-              <a:rPr sz="1600" b="0" i="0">
+              <a:rPr sz="2000" b="0" i="0">
                 <a:solidFill>
                   <a:srgbClr val="333333"/>
                 </a:solidFill>
@@ -8603,7 +8603,7 @@
               </a:spcAft>
             </a:pPr>
             <a:r>
-              <a:rPr sz="1600" b="0" i="0">
+              <a:rPr sz="2000" b="0" i="0">
                 <a:solidFill>
                   <a:srgbClr val="333333"/>
                 </a:solidFill>
@@ -8612,7 +8612,7 @@
               <a:t>–   </a:t>
             </a:r>
             <a:r>
-              <a:rPr sz="1600" b="1" i="0">
+              <a:rPr sz="2000" b="1" i="0">
                 <a:solidFill>
                   <a:srgbClr val="333333"/>
                 </a:solidFill>
@@ -8621,7 +8621,7 @@
               <a:t>Demo:</a:t>
             </a:r>
             <a:r>
-              <a:rPr sz="1600" b="0" i="0">
+              <a:rPr sz="2000" b="0" i="0">
                 <a:solidFill>
                   <a:srgbClr val="333333"/>
                 </a:solidFill>
@@ -8637,7 +8637,7 @@
               </a:spcAft>
             </a:pPr>
             <a:r>
-              <a:rPr sz="1600" b="0" i="0">
+              <a:rPr sz="2000" b="0" i="0">
                 <a:solidFill>
                   <a:srgbClr val="333333"/>
                 </a:solidFill>
@@ -9888,7 +9888,7 @@
               </a:spcAft>
             </a:pPr>
             <a:r>
-              <a:rPr sz="1600" b="0" i="0">
+              <a:rPr sz="2000" b="0" i="0">
                 <a:solidFill>
                   <a:srgbClr val="333333"/>
                 </a:solidFill>
@@ -9897,7 +9897,7 @@
               <a:t>–   </a:t>
             </a:r>
             <a:r>
-              <a:rPr sz="1600" b="1" i="0">
+              <a:rPr sz="2000" b="1" i="0">
                 <a:solidFill>
                   <a:srgbClr val="333333"/>
                 </a:solidFill>
@@ -9906,7 +9906,7 @@
               <a:t>Por que importa al PI:</a:t>
             </a:r>
             <a:r>
-              <a:rPr sz="1600" b="0" i="0">
+              <a:rPr sz="2000" b="0" i="0">
                 <a:solidFill>
                   <a:srgbClr val="333333"/>
                 </a:solidFill>
@@ -9922,7 +9922,7 @@
               </a:spcAft>
             </a:pPr>
             <a:r>
-              <a:rPr sz="1600" b="0" i="0">
+              <a:rPr sz="2000" b="0" i="0">
                 <a:solidFill>
                   <a:srgbClr val="333333"/>
                 </a:solidFill>
@@ -9938,7 +9938,7 @@
               </a:spcAft>
             </a:pPr>
             <a:r>
-              <a:rPr sz="1600" b="0" i="0">
+              <a:rPr sz="2000" b="0" i="0">
                 <a:solidFill>
                   <a:srgbClr val="333333"/>
                 </a:solidFill>
@@ -10158,7 +10158,7 @@
               </a:spcAft>
             </a:pPr>
             <a:r>
-              <a:rPr sz="1600" b="0" i="0">
+              <a:rPr sz="2000" b="0" i="0">
                 <a:solidFill>
                   <a:srgbClr val="333333"/>
                 </a:solidFill>
@@ -10174,7 +10174,7 @@
               </a:spcAft>
             </a:pPr>
             <a:r>
-              <a:rPr sz="1600" b="0" i="0">
+              <a:rPr sz="2000" b="0" i="0">
                 <a:solidFill>
                   <a:srgbClr val="333333"/>
                 </a:solidFill>
@@ -10190,7 +10190,7 @@
               </a:spcAft>
             </a:pPr>
             <a:r>
-              <a:rPr sz="1600" b="0" i="0">
+              <a:rPr sz="2000" b="0" i="0">
                 <a:solidFill>
                   <a:srgbClr val="333333"/>
                 </a:solidFill>

--- a/Seminario de Sistemas/Clases/Clase 4 - Metodologias agiles/Presentacion.pptx
+++ b/Seminario de Sistemas/Clases/Clase 4 - Metodologias agiles/Presentacion.pptx
@@ -4394,7 +4394,7 @@
                 </a:solidFill>
                 <a:latin typeface="Calibri"/>
               </a:rPr>
-              <a:t>En draw.io o Excalidraw arme el tablero con las columnas Por hacer / Modelando / En revision del cliente / Aprobado, ponga el limite de trabajo en curso en dos para las columnas del medio, distribuya las tarjetas en tres sprints con su objetivo y entregable de diseño, exporte a PDF y suba a ExamLab.</a:t>
+              <a:t>En draw.io o Excalidraw arme el tablero con las columnas Por hacer / Modelando / En revision del cliente / Aprobado, ponga el limite de trabajo en curso en dos para las columnas del medio, distribuya las tarjetas en tres sprints con su objetivo y entregable de diseño, exporte a PDF y suba a la plataforma del curso.</a:t>
             </a:r>
           </a:p>
         </p:txBody>
@@ -5469,7 +5469,7 @@
                 </a:solidFill>
                 <a:latin typeface="Calibri"/>
               </a:rPr>
-              <a:t>Entrega en ExamLab (https://uniaj.examlab.workers.dev/)</a:t>
+              <a:t>Entrega en la plataforma del curso</a:t>
             </a:r>
             <a:r>
               <a:rPr sz="2000" b="0" i="0">
@@ -5478,7 +5478,7 @@
                 </a:solidFill>
                 <a:latin typeface="Calibri"/>
               </a:rPr>
-              <a:t> — domingo 23:59.</a:t>
+              <a:t> — en la fecha que indique el docente.</a:t>
             </a:r>
           </a:p>
         </p:txBody>
@@ -6073,7 +6073,7 @@
                 </a:solidFill>
                 <a:latin typeface="Calibri"/>
               </a:rPr>
-              <a:t>Entrega del taller en ExamLab (https://uniaj.examlab.workers.dev/) · domingo 23:59.</a:t>
+              <a:t>Entrega del taller, si el docente lo asigna · en la fecha que indique el docente.</a:t>
             </a:r>
           </a:p>
         </p:txBody>
@@ -9658,7 +9658,7 @@
                 </a:solidFill>
                 <a:latin typeface="Calibri"/>
               </a:rPr>
-              <a:t>ExamLab</a:t>
+              <a:t>la plataforma del curso</a:t>
             </a:r>
           </a:p>
           <a:p>
@@ -9674,7 +9674,7 @@
                 </a:solidFill>
                 <a:latin typeface="Calibri"/>
               </a:rPr>
-              <a:t>Entrega del taller · domingo 23:59</a:t>
+              <a:t>Entrega del taller · en la fecha que indique el docente</a:t>
             </a:r>
           </a:p>
         </p:txBody>
